--- a/RA4 - Seguretat en xarxa/AA4 - Tallafocs/RA4_AA4_Tallafocs.pptx
+++ b/RA4 - Seguretat en xarxa/AA4 - Tallafocs/RA4_AA4_Tallafocs.pptx
@@ -1962,6 +1962,10 @@
           </a:solidFill>
           <a:ln/>
         </p:spPr>
+        <p:txBody>
+          <a:bodyPr/>
+          <a:p/>
+        </p:txBody>
       </p:sp>
       <p:sp>
         <p:nvSpPr>
@@ -1982,6 +1986,10 @@
           </a:solidFill>
           <a:ln/>
         </p:spPr>
+        <p:txBody>
+          <a:bodyPr/>
+          <a:p/>
+        </p:txBody>
       </p:sp>
       <p:sp>
         <p:nvSpPr>
@@ -2465,6 +2473,10 @@
           </a:solidFill>
           <a:ln/>
         </p:spPr>
+        <p:txBody>
+          <a:bodyPr/>
+          <a:p/>
+        </p:txBody>
       </p:sp>
       <p:pic>
         <p:nvPicPr>
@@ -2714,6 +2726,10 @@
             </a:outerShdw>
           </a:effectLst>
         </p:spPr>
+        <p:txBody>
+          <a:bodyPr/>
+          <a:p/>
+        </p:txBody>
       </p:sp>
       <p:sp>
         <p:nvSpPr>
@@ -2734,6 +2750,10 @@
           </a:solidFill>
           <a:ln/>
         </p:spPr>
+        <p:txBody>
+          <a:bodyPr/>
+          <a:p/>
+        </p:txBody>
       </p:sp>
       <p:pic>
         <p:nvPicPr>
@@ -2873,6 +2893,10 @@
             </a:outerShdw>
           </a:effectLst>
         </p:spPr>
+        <p:txBody>
+          <a:bodyPr/>
+          <a:p/>
+        </p:txBody>
       </p:sp>
       <p:sp>
         <p:nvSpPr>
@@ -2893,6 +2917,10 @@
           </a:solidFill>
           <a:ln/>
         </p:spPr>
+        <p:txBody>
+          <a:bodyPr/>
+          <a:p/>
+        </p:txBody>
       </p:sp>
       <p:pic>
         <p:nvPicPr>
@@ -3032,6 +3060,10 @@
             </a:outerShdw>
           </a:effectLst>
         </p:spPr>
+        <p:txBody>
+          <a:bodyPr/>
+          <a:p/>
+        </p:txBody>
       </p:sp>
       <p:sp>
         <p:nvSpPr>
@@ -3052,6 +3084,10 @@
           </a:solidFill>
           <a:ln/>
         </p:spPr>
+        <p:txBody>
+          <a:bodyPr/>
+          <a:p/>
+        </p:txBody>
       </p:sp>
       <p:pic>
         <p:nvPicPr>
@@ -3975,7 +4011,7 @@
                 <a:ea typeface="Calibri" pitchFamily="34" charset="-122"/>
                 <a:cs typeface="Calibri" pitchFamily="34" charset="-120"/>
               </a:rPr>
-              <a:t>Llicència Creative Commons BY-NC-SA · Institut Obert de Catalunya, 2011 (materials adaptats i ampliats)</a:t>
+              <a:t>Llicència CC BY-SA 4.0 · Adaptat de "Materials" (SMX-0226SI), Carlos Alonso Martínez, Escola Pia de Mataró</a:t>
             </a:r>
             <a:endParaRPr lang="en-US" sz="1050" dirty="0"/>
           </a:p>
@@ -4202,6 +4238,10 @@
             </a:outerShdw>
           </a:effectLst>
         </p:spPr>
+        <p:txBody>
+          <a:bodyPr/>
+          <a:p/>
+        </p:txBody>
       </p:sp>
       <p:sp>
         <p:nvSpPr>
@@ -4222,6 +4262,10 @@
           </a:solidFill>
           <a:ln/>
         </p:spPr>
+        <p:txBody>
+          <a:bodyPr/>
+          <a:p/>
+        </p:txBody>
       </p:sp>
       <p:pic>
         <p:nvPicPr>
@@ -4361,6 +4405,10 @@
             </a:outerShdw>
           </a:effectLst>
         </p:spPr>
+        <p:txBody>
+          <a:bodyPr/>
+          <a:p/>
+        </p:txBody>
       </p:sp>
       <p:sp>
         <p:nvSpPr>
@@ -4381,6 +4429,10 @@
           </a:solidFill>
           <a:ln/>
         </p:spPr>
+        <p:txBody>
+          <a:bodyPr/>
+          <a:p/>
+        </p:txBody>
       </p:sp>
       <p:pic>
         <p:nvPicPr>
@@ -4520,6 +4572,10 @@
             </a:outerShdw>
           </a:effectLst>
         </p:spPr>
+        <p:txBody>
+          <a:bodyPr/>
+          <a:p/>
+        </p:txBody>
       </p:sp>
       <p:sp>
         <p:nvSpPr>
@@ -4540,6 +4596,10 @@
           </a:solidFill>
           <a:ln/>
         </p:spPr>
+        <p:txBody>
+          <a:bodyPr/>
+          <a:p/>
+        </p:txBody>
       </p:sp>
       <p:pic>
         <p:nvPicPr>
@@ -5151,6 +5211,10 @@
           </a:solidFill>
           <a:ln/>
         </p:spPr>
+        <p:txBody>
+          <a:bodyPr/>
+          <a:p/>
+        </p:txBody>
       </p:sp>
       <p:pic>
         <p:nvPicPr>
@@ -6201,6 +6265,10 @@
             </a:outerShdw>
           </a:effectLst>
         </p:spPr>
+        <p:txBody>
+          <a:bodyPr/>
+          <a:p/>
+        </p:txBody>
       </p:sp>
       <p:sp>
         <p:nvSpPr>
@@ -6221,6 +6289,10 @@
           </a:solidFill>
           <a:ln/>
         </p:spPr>
+        <p:txBody>
+          <a:bodyPr/>
+          <a:p/>
+        </p:txBody>
       </p:sp>
       <p:pic>
         <p:nvPicPr>
@@ -6360,6 +6432,10 @@
             </a:outerShdw>
           </a:effectLst>
         </p:spPr>
+        <p:txBody>
+          <a:bodyPr/>
+          <a:p/>
+        </p:txBody>
       </p:sp>
       <p:sp>
         <p:nvSpPr>
@@ -6380,6 +6456,10 @@
           </a:solidFill>
           <a:ln/>
         </p:spPr>
+        <p:txBody>
+          <a:bodyPr/>
+          <a:p/>
+        </p:txBody>
       </p:sp>
       <p:pic>
         <p:nvPicPr>
@@ -6507,6 +6587,10 @@
           </a:solidFill>
           <a:ln/>
         </p:spPr>
+        <p:txBody>
+          <a:bodyPr/>
+          <a:p/>
+        </p:txBody>
       </p:sp>
       <p:pic>
         <p:nvPicPr>
@@ -6756,6 +6840,10 @@
             </a:outerShdw>
           </a:effectLst>
         </p:spPr>
+        <p:txBody>
+          <a:bodyPr/>
+          <a:p/>
+        </p:txBody>
       </p:sp>
       <p:sp>
         <p:nvSpPr>
@@ -6776,6 +6864,10 @@
           </a:solidFill>
           <a:ln/>
         </p:spPr>
+        <p:txBody>
+          <a:bodyPr/>
+          <a:p/>
+        </p:txBody>
       </p:sp>
       <p:pic>
         <p:nvPicPr>
@@ -6915,6 +7007,10 @@
             </a:outerShdw>
           </a:effectLst>
         </p:spPr>
+        <p:txBody>
+          <a:bodyPr/>
+          <a:p/>
+        </p:txBody>
       </p:sp>
       <p:sp>
         <p:nvSpPr>
@@ -6935,6 +7031,10 @@
           </a:solidFill>
           <a:ln/>
         </p:spPr>
+        <p:txBody>
+          <a:bodyPr/>
+          <a:p/>
+        </p:txBody>
       </p:sp>
       <p:pic>
         <p:nvPicPr>
@@ -7062,6 +7162,10 @@
           </a:solidFill>
           <a:ln/>
         </p:spPr>
+        <p:txBody>
+          <a:bodyPr/>
+          <a:p/>
+        </p:txBody>
       </p:sp>
       <p:pic>
         <p:nvPicPr>
@@ -7564,6 +7668,10 @@
           </a:solidFill>
           <a:ln/>
         </p:spPr>
+        <p:txBody>
+          <a:bodyPr/>
+          <a:p/>
+        </p:txBody>
       </p:sp>
       <p:pic>
         <p:nvPicPr>
